--- a/slides/decks/L09-openset.pptx
+++ b/slides/decks/L09-openset.pptx
@@ -120,13 +120,13 @@
   <p:extLst>
     <p:ext uri="{521415D9-36F7-43E2-AB2F-B90AF26B5E84}">
       <p14:sectionLst xmlns:p14="http://schemas.microsoft.com/office/powerpoint/2010/main">
-        <p14:section name="开场" id="{f4eb9d7f-d404-8fe5-6c10-6934c08c039c}">
+        <p14:section name="开场" id="{a8051ff5-b117-792e-a243-44560628e7df}">
           <p14:sldIdLst>
             <p14:sldId id="256"/>
             <p14:sldId id="257"/>
           </p14:sldIdLst>
         </p14:section>
-        <p14:section name="讲解" id="{447c0493-41cc-29a3-5ac4-a9346a07912e}">
+        <p14:section name="讲解" id="{868deb8e-a2dc-504b-99d6-e8497cdcfe28}">
           <p14:sldIdLst>
             <p14:sldId id="258"/>
             <p14:sldId id="259"/>
@@ -139,13 +139,13 @@
             <p14:sldId id="266"/>
           </p14:sldIdLst>
         </p14:section>
-        <p14:section name="练习" id="{1be14e45-fd75-5215-ac13-d3cc141d4ca1}">
+        <p14:section name="练习" id="{544b11fd-4920-7252-3ff1-f17a0ccfede0}">
           <p14:sldIdLst>
             <p14:sldId id="267"/>
             <p14:sldId id="268"/>
           </p14:sldIdLst>
         </p14:section>
-        <p14:section name="收束" id="{68101b7d-8529-1cb0-33ac-c6a800984884}">
+        <p14:section name="收束" id="{ab15757a-0f90-83a7-5d6f-9fc8e448ed81}">
           <p14:sldIdLst>
             <p14:sldId id="269"/>
           </p14:sldIdLst>
